--- a/posts/2024/AI/Bayes.pptx
+++ b/posts/2024/AI/Bayes.pptx
@@ -3573,28 +3573,30 @@
                       </m:rPr>
                       <m:t>∈</m:t>
                     </m:r>
-                    <m:d>
-                      <m:dPr>
-                        <m:begChr m:val="("/>
-                        <m:sepChr m:val=""/>
-                        <m:endChr m:val=")"/>
-                        <m:grow/>
-                      </m:dPr>
-                      <m:e>
-                        <m:r>
-                          <m:t>0</m:t>
-                        </m:r>
-                        <m:r>
-                          <m:rPr>
-                            <m:sty m:val="p"/>
-                          </m:rPr>
-                          <m:t>,</m:t>
-                        </m:r>
-                        <m:r>
-                          <m:t>1</m:t>
-                        </m:r>
-                      </m:e>
-                    </m:d>
+                    <m:r>
+                      <m:rPr>
+                        <m:sty m:val="p"/>
+                      </m:rPr>
+                      <m:t>(</m:t>
+                    </m:r>
+                    <m:r>
+                      <m:t>0</m:t>
+                    </m:r>
+                    <m:r>
+                      <m:rPr>
+                        <m:sty m:val="p"/>
+                      </m:rPr>
+                      <m:t>,</m:t>
+                    </m:r>
+                    <m:r>
+                      <m:t>1</m:t>
+                    </m:r>
+                    <m:r>
+                      <m:rPr>
+                        <m:sty m:val="p"/>
+                      </m:rPr>
+                      <m:t>)</m:t>
+                    </m:r>
                   </m:oMath>
                 </a14:m>
                 <a:r>
@@ -3796,56 +3798,60 @@
                 </a:r>
                 <a14:m>
                   <m:oMath xmlns:m="http://schemas.openxmlformats.org/officeDocument/2006/math">
-                    <m:d>
-                      <m:dPr>
-                        <m:begChr m:val="("/>
-                        <m:sepChr m:val=""/>
-                        <m:endChr m:val=")"/>
-                        <m:grow/>
-                      </m:dPr>
-                      <m:e>
-                        <m:r>
-                          <m:t>a</m:t>
-                        </m:r>
-                        <m:r>
-                          <m:rPr>
-                            <m:sty m:val="p"/>
-                          </m:rPr>
-                          <m:t>,</m:t>
-                        </m:r>
-                        <m:r>
-                          <m:t>b</m:t>
-                        </m:r>
-                      </m:e>
-                    </m:d>
+                    <m:r>
+                      <m:rPr>
+                        <m:sty m:val="p"/>
+                      </m:rPr>
+                      <m:t>(</m:t>
+                    </m:r>
+                    <m:r>
+                      <m:t>a</m:t>
+                    </m:r>
+                    <m:r>
+                      <m:rPr>
+                        <m:sty m:val="p"/>
+                      </m:rPr>
+                      <m:t>,</m:t>
+                    </m:r>
+                    <m:r>
+                      <m:t>b</m:t>
+                    </m:r>
+                    <m:r>
+                      <m:rPr>
+                        <m:sty m:val="p"/>
+                      </m:rPr>
+                      <m:t>)</m:t>
+                    </m:r>
                     <m:r>
                       <m:rPr>
                         <m:sty m:val="p"/>
                       </m:rPr>
                       <m:t>⊂</m:t>
                     </m:r>
-                    <m:d>
-                      <m:dPr>
-                        <m:begChr m:val="["/>
-                        <m:sepChr m:val=""/>
-                        <m:endChr m:val="]"/>
-                        <m:grow/>
-                      </m:dPr>
-                      <m:e>
-                        <m:r>
-                          <m:t>0</m:t>
-                        </m:r>
-                        <m:r>
-                          <m:rPr>
-                            <m:sty m:val="p"/>
-                          </m:rPr>
-                          <m:t>,</m:t>
-                        </m:r>
-                        <m:r>
-                          <m:t>1</m:t>
-                        </m:r>
-                      </m:e>
-                    </m:d>
+                    <m:r>
+                      <m:rPr>
+                        <m:sty m:val="p"/>
+                      </m:rPr>
+                      <m:t>[</m:t>
+                    </m:r>
+                    <m:r>
+                      <m:t>0</m:t>
+                    </m:r>
+                    <m:r>
+                      <m:rPr>
+                        <m:sty m:val="p"/>
+                      </m:rPr>
+                      <m:t>,</m:t>
+                    </m:r>
+                    <m:r>
+                      <m:t>1</m:t>
+                    </m:r>
+                    <m:r>
+                      <m:rPr>
+                        <m:sty m:val="p"/>
+                      </m:rPr>
+                      <m:t>]</m:t>
+                    </m:r>
                   </m:oMath>
                 </a14:m>
                 <a:r>
@@ -3913,28 +3919,30 @@
                     <m:r>
                       <m:t>p</m:t>
                     </m:r>
-                    <m:d>
-                      <m:dPr>
-                        <m:begChr m:val="("/>
-                        <m:sepChr m:val=""/>
-                        <m:endChr m:val=")"/>
-                        <m:grow/>
-                      </m:dPr>
-                      <m:e>
-                        <m:r>
-                          <m:t>y</m:t>
-                        </m:r>
-                        <m:r>
-                          <m:rPr>
-                            <m:sty m:val="p"/>
-                          </m:rPr>
-                          <m:t>|</m:t>
-                        </m:r>
-                        <m:r>
-                          <m:t>θ</m:t>
-                        </m:r>
-                      </m:e>
-                    </m:d>
+                    <m:r>
+                      <m:rPr>
+                        <m:sty m:val="p"/>
+                      </m:rPr>
+                      <m:t>(</m:t>
+                    </m:r>
+                    <m:r>
+                      <m:t>y</m:t>
+                    </m:r>
+                    <m:r>
+                      <m:rPr>
+                        <m:sty m:val="p"/>
+                      </m:rPr>
+                      <m:t>|</m:t>
+                    </m:r>
+                    <m:r>
+                      <m:t>θ</m:t>
+                    </m:r>
+                    <m:r>
+                      <m:rPr>
+                        <m:sty m:val="p"/>
+                      </m:rPr>
+                      <m:t>)</m:t>
+                    </m:r>
                   </m:oMath>
                 </a14:m>
                 <a:r>
@@ -3946,28 +3954,30 @@
                     <m:r>
                       <m:t>p</m:t>
                     </m:r>
-                    <m:d>
-                      <m:dPr>
-                        <m:begChr m:val="("/>
-                        <m:sepChr m:val=""/>
-                        <m:endChr m:val=")"/>
-                        <m:grow/>
-                      </m:dPr>
-                      <m:e>
-                        <m:r>
-                          <m:t>θ</m:t>
-                        </m:r>
-                        <m:r>
-                          <m:rPr>
-                            <m:sty m:val="p"/>
-                          </m:rPr>
-                          <m:t>|</m:t>
-                        </m:r>
-                        <m:r>
-                          <m:t>y</m:t>
-                        </m:r>
-                      </m:e>
-                    </m:d>
+                    <m:r>
+                      <m:rPr>
+                        <m:sty m:val="p"/>
+                      </m:rPr>
+                      <m:t>(</m:t>
+                    </m:r>
+                    <m:r>
+                      <m:t>θ</m:t>
+                    </m:r>
+                    <m:r>
+                      <m:rPr>
+                        <m:sty m:val="p"/>
+                      </m:rPr>
+                      <m:t>|</m:t>
+                    </m:r>
+                    <m:r>
+                      <m:t>y</m:t>
+                    </m:r>
+                    <m:r>
+                      <m:rPr>
+                        <m:sty m:val="p"/>
+                      </m:rPr>
+                      <m:t>)</m:t>
+                    </m:r>
                   </m:oMath>
                 </a14:m>
                 <a:r>
@@ -4098,6 +4108,9 @@
                 <a14:m>
                   <m:oMath xmlns:m="http://schemas.openxmlformats.org/officeDocument/2006/math">
                     <m:r>
+                      <m:rPr>
+                        <m:sty m:val="p"/>
+                      </m:rPr>
                       <m:t>Θ</m:t>
                     </m:r>
                     <m:r>
@@ -4117,6 +4130,9 @@
                       </m:e>
                       <m:sup>
                         <m:r>
+                          <m:rPr>
+                            <m:sty m:val="p"/>
+                          </m:rPr>
                           <m:t>Θ</m:t>
                         </m:r>
                       </m:sup>
@@ -4142,8 +4158,8 @@
                   <m:oMath xmlns:m="http://schemas.openxmlformats.org/officeDocument/2006/math">
                     <m:r>
                       <m:rPr>
+                        <m:scr m:val="script"/>
                         <m:sty m:val="p"/>
-                        <m:scr m:val="script"/>
                       </m:rPr>
                       <m:t>G</m:t>
                     </m:r>
@@ -4170,58 +4186,67 @@
                         </m:rPr>
                         <m:t>E</m:t>
                       </m:r>
-                      <m:d>
-                        <m:dPr>
-                          <m:begChr m:val="["/>
-                          <m:sepChr m:val=""/>
-                          <m:endChr m:val="]"/>
-                          <m:grow/>
-                        </m:dPr>
-                        <m:e>
-                          <m:r>
-                            <m:t>g</m:t>
-                          </m:r>
-                          <m:d>
-                            <m:dPr>
-                              <m:begChr m:val="("/>
-                              <m:sepChr m:val=""/>
-                              <m:endChr m:val=")"/>
-                              <m:grow/>
-                            </m:dPr>
-                            <m:e>
-                              <m:r>
-                                <m:t>Θ</m:t>
-                              </m:r>
-                            </m:e>
-                          </m:d>
-                          <m:r>
-                            <m:rPr>
-                              <m:sty m:val="p"/>
-                            </m:rPr>
-                            <m:t>|</m:t>
-                          </m:r>
-                          <m:r>
-                            <m:rPr>
-                              <m:sty m:val="p"/>
-                              <m:scr m:val="script"/>
-                            </m:rPr>
-                            <m:t>G</m:t>
-                          </m:r>
-                        </m:e>
-                      </m:d>
-                      <m:d>
-                        <m:dPr>
-                          <m:begChr m:val="("/>
-                          <m:sepChr m:val=""/>
-                          <m:endChr m:val=")"/>
-                          <m:grow/>
-                        </m:dPr>
-                        <m:e>
-                          <m:r>
-                            <m:t>ω</m:t>
-                          </m:r>
-                        </m:e>
-                      </m:d>
+                      <m:r>
+                        <m:rPr>
+                          <m:sty m:val="p"/>
+                        </m:rPr>
+                        <m:t>[</m:t>
+                      </m:r>
+                      <m:r>
+                        <m:t>g</m:t>
+                      </m:r>
+                      <m:r>
+                        <m:rPr>
+                          <m:sty m:val="p"/>
+                        </m:rPr>
+                        <m:t>(</m:t>
+                      </m:r>
+                      <m:r>
+                        <m:rPr>
+                          <m:sty m:val="p"/>
+                        </m:rPr>
+                        <m:t>Θ</m:t>
+                      </m:r>
+                      <m:r>
+                        <m:rPr>
+                          <m:sty m:val="p"/>
+                        </m:rPr>
+                        <m:t>)</m:t>
+                      </m:r>
+                      <m:r>
+                        <m:rPr>
+                          <m:sty m:val="p"/>
+                        </m:rPr>
+                        <m:t>|</m:t>
+                      </m:r>
+                      <m:r>
+                        <m:rPr>
+                          <m:scr m:val="script"/>
+                          <m:sty m:val="p"/>
+                        </m:rPr>
+                        <m:t>G</m:t>
+                      </m:r>
+                      <m:r>
+                        <m:rPr>
+                          <m:sty m:val="p"/>
+                        </m:rPr>
+                        <m:t>]</m:t>
+                      </m:r>
+                      <m:r>
+                        <m:rPr>
+                          <m:sty m:val="p"/>
+                        </m:rPr>
+                        <m:t>(</m:t>
+                      </m:r>
+                      <m:r>
+                        <m:t>ω</m:t>
+                      </m:r>
+                      <m:r>
+                        <m:rPr>
+                          <m:sty m:val="p"/>
+                        </m:rPr>
+                        <m:t>)</m:t>
+                      </m:r>
                       <m:r>
                         <m:rPr>
                           <m:sty m:val="p"/>
@@ -4243,8 +4268,8 @@
                             <m:sub>
                               <m:r>
                                 <m:rPr>
+                                  <m:scr m:val="double-struck"/>
                                   <m:sty m:val="p"/>
-                                  <m:scr m:val="double-struck"/>
                                 </m:rPr>
                                 <m:t>R</m:t>
                               </m:r>
@@ -4260,44 +4285,48 @@
                               </m:r>
                             </m:e>
                           </m:nary>
-                          <m:d>
-                            <m:dPr>
-                              <m:begChr m:val="("/>
-                              <m:sepChr m:val=""/>
-                              <m:endChr m:val=")"/>
-                              <m:grow/>
-                            </m:dPr>
-                            <m:e>
-                              <m:r>
-                                <m:t>θ</m:t>
-                              </m:r>
-                            </m:e>
-                          </m:d>
+                          <m:r>
+                            <m:rPr>
+                              <m:sty m:val="p"/>
+                            </m:rPr>
+                            <m:t>(</m:t>
+                          </m:r>
+                          <m:r>
+                            <m:t>θ</m:t>
+                          </m:r>
+                          <m:r>
+                            <m:rPr>
+                              <m:sty m:val="p"/>
+                            </m:rPr>
+                            <m:t>)</m:t>
+                          </m:r>
                           <m:r>
                             <m:t>p</m:t>
                           </m:r>
-                          <m:d>
-                            <m:dPr>
-                              <m:begChr m:val="("/>
-                              <m:sepChr m:val=""/>
-                              <m:endChr m:val=")"/>
-                              <m:grow/>
-                            </m:dPr>
-                            <m:e>
-                              <m:r>
-                                <m:t>ω</m:t>
-                              </m:r>
-                              <m:r>
-                                <m:rPr>
-                                  <m:sty m:val="p"/>
-                                </m:rPr>
-                                <m:t>|</m:t>
-                              </m:r>
-                              <m:r>
-                                <m:t>θ</m:t>
-                              </m:r>
-                            </m:e>
-                          </m:d>
+                          <m:r>
+                            <m:rPr>
+                              <m:sty m:val="p"/>
+                            </m:rPr>
+                            <m:t>(</m:t>
+                          </m:r>
+                          <m:r>
+                            <m:t>ω</m:t>
+                          </m:r>
+                          <m:r>
+                            <m:rPr>
+                              <m:sty m:val="p"/>
+                            </m:rPr>
+                            <m:t>|</m:t>
+                          </m:r>
+                          <m:r>
+                            <m:t>θ</m:t>
+                          </m:r>
+                          <m:r>
+                            <m:rPr>
+                              <m:sty m:val="p"/>
+                            </m:rPr>
+                            <m:t>)</m:t>
+                          </m:r>
                           <m:sSup>
                             <m:e>
                               <m:r>
@@ -4309,26 +4338,31 @@
                             </m:e>
                             <m:sup>
                               <m:r>
+                                <m:rPr>
+                                  <m:sty m:val="p"/>
+                                </m:rPr>
                                 <m:t>Θ</m:t>
                               </m:r>
                             </m:sup>
                           </m:sSup>
-                          <m:d>
-                            <m:dPr>
-                              <m:begChr m:val="("/>
-                              <m:sepChr m:val=""/>
-                              <m:endChr m:val=")"/>
-                              <m:grow/>
-                            </m:dPr>
-                            <m:e>
-                              <m:r>
-                                <m:t>d</m:t>
-                              </m:r>
-                              <m:r>
-                                <m:t>θ</m:t>
-                              </m:r>
-                            </m:e>
-                          </m:d>
+                          <m:r>
+                            <m:rPr>
+                              <m:sty m:val="p"/>
+                            </m:rPr>
+                            <m:t>(</m:t>
+                          </m:r>
+                          <m:r>
+                            <m:t>d</m:t>
+                          </m:r>
+                          <m:r>
+                            <m:t>θ</m:t>
+                          </m:r>
+                          <m:r>
+                            <m:rPr>
+                              <m:sty m:val="p"/>
+                            </m:rPr>
+                            <m:t>)</m:t>
+                          </m:r>
                         </m:num>
                         <m:den>
                           <m:nary>
@@ -4341,8 +4375,8 @@
                             <m:sub>
                               <m:r>
                                 <m:rPr>
+                                  <m:scr m:val="double-struck"/>
                                   <m:sty m:val="p"/>
-                                  <m:scr m:val="double-struck"/>
                                 </m:rPr>
                                 <m:t>R</m:t>
                               </m:r>
@@ -4358,28 +4392,30 @@
                               </m:r>
                             </m:e>
                           </m:nary>
-                          <m:d>
-                            <m:dPr>
-                              <m:begChr m:val="("/>
-                              <m:sepChr m:val=""/>
-                              <m:endChr m:val=")"/>
-                              <m:grow/>
-                            </m:dPr>
-                            <m:e>
-                              <m:r>
-                                <m:t>ω</m:t>
-                              </m:r>
-                              <m:r>
-                                <m:rPr>
-                                  <m:sty m:val="p"/>
-                                </m:rPr>
-                                <m:t>|</m:t>
-                              </m:r>
-                              <m:r>
-                                <m:t>θ</m:t>
-                              </m:r>
-                            </m:e>
-                          </m:d>
+                          <m:r>
+                            <m:rPr>
+                              <m:sty m:val="p"/>
+                            </m:rPr>
+                            <m:t>(</m:t>
+                          </m:r>
+                          <m:r>
+                            <m:t>ω</m:t>
+                          </m:r>
+                          <m:r>
+                            <m:rPr>
+                              <m:sty m:val="p"/>
+                            </m:rPr>
+                            <m:t>|</m:t>
+                          </m:r>
+                          <m:r>
+                            <m:t>θ</m:t>
+                          </m:r>
+                          <m:r>
+                            <m:rPr>
+                              <m:sty m:val="p"/>
+                            </m:rPr>
+                            <m:t>)</m:t>
+                          </m:r>
                           <m:sSup>
                             <m:e>
                               <m:r>
@@ -4391,26 +4427,31 @@
                             </m:e>
                             <m:sup>
                               <m:r>
+                                <m:rPr>
+                                  <m:sty m:val="p"/>
+                                </m:rPr>
                                 <m:t>Θ</m:t>
                               </m:r>
                             </m:sup>
                           </m:sSup>
-                          <m:d>
-                            <m:dPr>
-                              <m:begChr m:val="("/>
-                              <m:sepChr m:val=""/>
-                              <m:endChr m:val=")"/>
-                              <m:grow/>
-                            </m:dPr>
-                            <m:e>
-                              <m:r>
-                                <m:t>d</m:t>
-                              </m:r>
-                              <m:r>
-                                <m:t>θ</m:t>
-                              </m:r>
-                            </m:e>
-                          </m:d>
+                          <m:r>
+                            <m:rPr>
+                              <m:sty m:val="p"/>
+                            </m:rPr>
+                            <m:t>(</m:t>
+                          </m:r>
+                          <m:r>
+                            <m:t>d</m:t>
+                          </m:r>
+                          <m:r>
+                            <m:t>θ</m:t>
+                          </m:r>
+                          <m:r>
+                            <m:rPr>
+                              <m:sty m:val="p"/>
+                            </m:rPr>
+                            <m:t>)</m:t>
+                          </m:r>
                         </m:den>
                       </m:f>
                       <m:r>
@@ -4458,28 +4499,30 @@
                       <m:r>
                         <m:t>p</m:t>
                       </m:r>
-                      <m:d>
-                        <m:dPr>
-                          <m:begChr m:val="("/>
-                          <m:sepChr m:val=""/>
-                          <m:endChr m:val=")"/>
-                          <m:grow/>
-                        </m:dPr>
-                        <m:e>
-                          <m:r>
-                            <m:t>θ</m:t>
-                          </m:r>
-                          <m:r>
-                            <m:rPr>
-                              <m:sty m:val="p"/>
-                            </m:rPr>
-                            <m:t>|</m:t>
-                          </m:r>
-                          <m:r>
-                            <m:t>x</m:t>
-                          </m:r>
-                        </m:e>
-                      </m:d>
+                      <m:r>
+                        <m:rPr>
+                          <m:sty m:val="p"/>
+                        </m:rPr>
+                        <m:t>(</m:t>
+                      </m:r>
+                      <m:r>
+                        <m:t>θ</m:t>
+                      </m:r>
+                      <m:r>
+                        <m:rPr>
+                          <m:sty m:val="p"/>
+                        </m:rPr>
+                        <m:t>|</m:t>
+                      </m:r>
+                      <m:r>
+                        <m:t>x</m:t>
+                      </m:r>
+                      <m:r>
+                        <m:rPr>
+                          <m:sty m:val="p"/>
+                        </m:rPr>
+                        <m:t>)</m:t>
+                      </m:r>
                       <m:r>
                         <m:rPr>
                           <m:sty m:val="p"/>
@@ -4494,44 +4537,48 @@
                           <m:r>
                             <m:t>p</m:t>
                           </m:r>
-                          <m:d>
-                            <m:dPr>
-                              <m:begChr m:val="("/>
-                              <m:sepChr m:val=""/>
-                              <m:endChr m:val=")"/>
-                              <m:grow/>
-                            </m:dPr>
-                            <m:e>
-                              <m:r>
-                                <m:t>x</m:t>
-                              </m:r>
-                              <m:r>
-                                <m:rPr>
-                                  <m:sty m:val="p"/>
-                                </m:rPr>
-                                <m:t>|</m:t>
-                              </m:r>
-                              <m:r>
-                                <m:t>θ</m:t>
-                              </m:r>
-                            </m:e>
-                          </m:d>
+                          <m:r>
+                            <m:rPr>
+                              <m:sty m:val="p"/>
+                            </m:rPr>
+                            <m:t>(</m:t>
+                          </m:r>
+                          <m:r>
+                            <m:t>x</m:t>
+                          </m:r>
+                          <m:r>
+                            <m:rPr>
+                              <m:sty m:val="p"/>
+                            </m:rPr>
+                            <m:t>|</m:t>
+                          </m:r>
+                          <m:r>
+                            <m:t>θ</m:t>
+                          </m:r>
+                          <m:r>
+                            <m:rPr>
+                              <m:sty m:val="p"/>
+                            </m:rPr>
+                            <m:t>)</m:t>
+                          </m:r>
                           <m:r>
                             <m:t>p</m:t>
                           </m:r>
-                          <m:d>
-                            <m:dPr>
-                              <m:begChr m:val="("/>
-                              <m:sepChr m:val=""/>
-                              <m:endChr m:val=")"/>
-                              <m:grow/>
-                            </m:dPr>
-                            <m:e>
-                              <m:r>
-                                <m:t>θ</m:t>
-                              </m:r>
-                            </m:e>
-                          </m:d>
+                          <m:r>
+                            <m:rPr>
+                              <m:sty m:val="p"/>
+                            </m:rPr>
+                            <m:t>(</m:t>
+                          </m:r>
+                          <m:r>
+                            <m:t>θ</m:t>
+                          </m:r>
+                          <m:r>
+                            <m:rPr>
+                              <m:sty m:val="p"/>
+                            </m:rPr>
+                            <m:t>)</m:t>
+                          </m:r>
                         </m:num>
                         <m:den>
                           <m:nary>
@@ -4543,6 +4590,9 @@
                             </m:naryPr>
                             <m:sub>
                               <m:r>
+                                <m:rPr>
+                                  <m:sty m:val="p"/>
+                                </m:rPr>
                                 <m:t>Θ</m:t>
                               </m:r>
                             </m:sub>
@@ -4557,44 +4607,48 @@
                               </m:r>
                             </m:e>
                           </m:nary>
-                          <m:d>
-                            <m:dPr>
-                              <m:begChr m:val="("/>
-                              <m:sepChr m:val=""/>
-                              <m:endChr m:val=")"/>
-                              <m:grow/>
-                            </m:dPr>
-                            <m:e>
-                              <m:r>
-                                <m:t>x</m:t>
-                              </m:r>
-                              <m:r>
-                                <m:rPr>
-                                  <m:sty m:val="p"/>
-                                </m:rPr>
-                                <m:t>|</m:t>
-                              </m:r>
-                              <m:r>
-                                <m:t>θ</m:t>
-                              </m:r>
-                            </m:e>
-                          </m:d>
+                          <m:r>
+                            <m:rPr>
+                              <m:sty m:val="p"/>
+                            </m:rPr>
+                            <m:t>(</m:t>
+                          </m:r>
+                          <m:r>
+                            <m:t>x</m:t>
+                          </m:r>
+                          <m:r>
+                            <m:rPr>
+                              <m:sty m:val="p"/>
+                            </m:rPr>
+                            <m:t>|</m:t>
+                          </m:r>
+                          <m:r>
+                            <m:t>θ</m:t>
+                          </m:r>
+                          <m:r>
+                            <m:rPr>
+                              <m:sty m:val="p"/>
+                            </m:rPr>
+                            <m:t>)</m:t>
+                          </m:r>
                           <m:r>
                             <m:t>p</m:t>
                           </m:r>
-                          <m:d>
-                            <m:dPr>
-                              <m:begChr m:val="("/>
-                              <m:sepChr m:val=""/>
-                              <m:endChr m:val=")"/>
-                              <m:grow/>
-                            </m:dPr>
-                            <m:e>
-                              <m:r>
-                                <m:t>θ</m:t>
-                              </m:r>
-                            </m:e>
-                          </m:d>
+                          <m:r>
+                            <m:rPr>
+                              <m:sty m:val="p"/>
+                            </m:rPr>
+                            <m:t>(</m:t>
+                          </m:r>
+                          <m:r>
+                            <m:t>θ</m:t>
+                          </m:r>
+                          <m:r>
+                            <m:rPr>
+                              <m:sty m:val="p"/>
+                            </m:rPr>
+                            <m:t>)</m:t>
+                          </m:r>
                           <m:r>
                             <m:t> </m:t>
                           </m:r>
@@ -4629,44 +4683,49 @@
                 </a:r>
                 <a14:m>
                   <m:oMath xmlns:m="http://schemas.openxmlformats.org/officeDocument/2006/math">
-                    <m:d>
-                      <m:dPr>
-                        <m:begChr m:val="("/>
-                        <m:sepChr m:val=""/>
-                        <m:endChr m:val=")"/>
-                        <m:grow/>
-                      </m:dPr>
-                      <m:e>
-                        <m:r>
-                          <m:t>Ω</m:t>
-                        </m:r>
-                        <m:r>
-                          <m:rPr>
-                            <m:sty m:val="p"/>
-                          </m:rPr>
-                          <m:t>,</m:t>
-                        </m:r>
-                        <m:r>
-                          <m:rPr>
-                            <m:sty m:val="p"/>
-                            <m:scr m:val="script"/>
-                          </m:rPr>
-                          <m:t>F</m:t>
-                        </m:r>
-                        <m:r>
-                          <m:rPr>
-                            <m:sty m:val="p"/>
-                          </m:rPr>
-                          <m:t>,</m:t>
-                        </m:r>
-                        <m:r>
-                          <m:rPr>
-                            <m:sty m:val="p"/>
-                          </m:rPr>
-                          <m:t>P</m:t>
-                        </m:r>
-                      </m:e>
-                    </m:d>
+                    <m:r>
+                      <m:rPr>
+                        <m:sty m:val="p"/>
+                      </m:rPr>
+                      <m:t>(</m:t>
+                    </m:r>
+                    <m:r>
+                      <m:rPr>
+                        <m:sty m:val="p"/>
+                      </m:rPr>
+                      <m:t>Ω</m:t>
+                    </m:r>
+                    <m:r>
+                      <m:rPr>
+                        <m:sty m:val="p"/>
+                      </m:rPr>
+                      <m:t>,</m:t>
+                    </m:r>
+                    <m:r>
+                      <m:rPr>
+                        <m:scr m:val="script"/>
+                        <m:sty m:val="p"/>
+                      </m:rPr>
+                      <m:t>F</m:t>
+                    </m:r>
+                    <m:r>
+                      <m:rPr>
+                        <m:sty m:val="p"/>
+                      </m:rPr>
+                      <m:t>,</m:t>
+                    </m:r>
+                    <m:r>
+                      <m:rPr>
+                        <m:sty m:val="p"/>
+                      </m:rPr>
+                      <m:t>P</m:t>
+                    </m:r>
+                    <m:r>
+                      <m:rPr>
+                        <m:sty m:val="p"/>
+                      </m:rPr>
+                      <m:t>)</m:t>
+                    </m:r>
                   </m:oMath>
                 </a14:m>
                 <a:r>
@@ -4676,6 +4735,9 @@
                 <a14:m>
                   <m:oMath xmlns:m="http://schemas.openxmlformats.org/officeDocument/2006/math">
                     <m:r>
+                      <m:rPr>
+                        <m:sty m:val="p"/>
+                      </m:rPr>
                       <m:t>Θ</m:t>
                     </m:r>
                   </m:oMath>
@@ -4687,6 +4749,9 @@
                 <a14:m>
                   <m:oMath xmlns:m="http://schemas.openxmlformats.org/officeDocument/2006/math">
                     <m:r>
+                      <m:rPr>
+                        <m:sty m:val="p"/>
+                      </m:rPr>
                       <m:t>Ω</m:t>
                     </m:r>
                     <m:r>
@@ -4697,8 +4762,8 @@
                     </m:r>
                     <m:r>
                       <m:rPr>
+                        <m:scr m:val="script"/>
                         <m:sty m:val="p"/>
-                        <m:scr m:val="script"/>
                       </m:rPr>
                       <m:t>X</m:t>
                     </m:r>
@@ -4721,28 +4786,30 @@
                     </m:r>
                     <m:r>
                       <m:rPr>
+                        <m:scr m:val="script"/>
                         <m:sty m:val="p"/>
-                        <m:scr m:val="script"/>
                       </m:rPr>
                       <m:t>L</m:t>
                     </m:r>
-                    <m:d>
-                      <m:dPr>
-                        <m:begChr m:val="("/>
-                        <m:sepChr m:val=""/>
-                        <m:endChr m:val=")"/>
-                        <m:grow/>
-                      </m:dPr>
-                      <m:e>
-                        <m:r>
-                          <m:rPr>
-                            <m:sty m:val="p"/>
-                            <m:scr m:val="script"/>
-                          </m:rPr>
-                          <m:t>X</m:t>
-                        </m:r>
-                      </m:e>
-                    </m:d>
+                    <m:r>
+                      <m:rPr>
+                        <m:sty m:val="p"/>
+                      </m:rPr>
+                      <m:t>(</m:t>
+                    </m:r>
+                    <m:r>
+                      <m:rPr>
+                        <m:scr m:val="script"/>
+                        <m:sty m:val="p"/>
+                      </m:rPr>
+                      <m:t>X</m:t>
+                    </m:r>
+                    <m:r>
+                      <m:rPr>
+                        <m:sty m:val="p"/>
+                      </m:rPr>
+                      <m:t>)</m:t>
+                    </m:r>
                   </m:oMath>
                 </a14:m>
                 <a:r>
@@ -4785,32 +4852,37 @@
                 </a:r>
                 <a14:m>
                   <m:oMath xmlns:m="http://schemas.openxmlformats.org/officeDocument/2006/math">
-                    <m:d>
-                      <m:dPr>
-                        <m:begChr m:val="("/>
-                        <m:sepChr m:val=""/>
-                        <m:endChr m:val=")"/>
-                        <m:grow/>
-                      </m:dPr>
-                      <m:e>
-                        <m:r>
-                          <m:t>Ω</m:t>
-                        </m:r>
-                        <m:r>
-                          <m:rPr>
-                            <m:sty m:val="p"/>
-                          </m:rPr>
-                          <m:t>,</m:t>
-                        </m:r>
-                        <m:r>
-                          <m:rPr>
-                            <m:sty m:val="p"/>
-                            <m:scr m:val="script"/>
-                          </m:rPr>
-                          <m:t>G</m:t>
-                        </m:r>
-                      </m:e>
-                    </m:d>
+                    <m:r>
+                      <m:rPr>
+                        <m:sty m:val="p"/>
+                      </m:rPr>
+                      <m:t>(</m:t>
+                    </m:r>
+                    <m:r>
+                      <m:rPr>
+                        <m:sty m:val="p"/>
+                      </m:rPr>
+                      <m:t>Ω</m:t>
+                    </m:r>
+                    <m:r>
+                      <m:rPr>
+                        <m:sty m:val="p"/>
+                      </m:rPr>
+                      <m:t>,</m:t>
+                    </m:r>
+                    <m:r>
+                      <m:rPr>
+                        <m:scr m:val="script"/>
+                        <m:sty m:val="p"/>
+                      </m:rPr>
+                      <m:t>G</m:t>
+                    </m:r>
+                    <m:r>
+                      <m:rPr>
+                        <m:sty m:val="p"/>
+                      </m:rPr>
+                      <m:t>)</m:t>
+                    </m:r>
                   </m:oMath>
                 </a14:m>
                 <a:r>
@@ -4848,19 +4920,21 @@
                         </m:rPr>
                         <m:t>Q</m:t>
                       </m:r>
-                      <m:d>
-                        <m:dPr>
-                          <m:begChr m:val="("/>
-                          <m:sepChr m:val=""/>
-                          <m:endChr m:val=")"/>
-                          <m:grow/>
-                        </m:dPr>
-                        <m:e>
-                          <m:r>
-                            <m:t>B</m:t>
-                          </m:r>
-                        </m:e>
-                      </m:d>
+                      <m:r>
+                        <m:rPr>
+                          <m:sty m:val="p"/>
+                        </m:rPr>
+                        <m:t>(</m:t>
+                      </m:r>
+                      <m:r>
+                        <m:t>B</m:t>
+                      </m:r>
+                      <m:r>
+                        <m:rPr>
+                          <m:sty m:val="p"/>
+                        </m:rPr>
+                        <m:t>)</m:t>
+                      </m:r>
                       <m:box>
                         <m:boxPr>
                           <m:opEmu m:val="on"/>
@@ -4897,54 +4971,60 @@
                           </m:r>
                         </m:e>
                       </m:nary>
-                      <m:d>
-                        <m:dPr>
-                          <m:begChr m:val="("/>
-                          <m:sepChr m:val=""/>
-                          <m:endChr m:val=")"/>
-                          <m:grow/>
-                        </m:dPr>
-                        <m:e>
-                          <m:r>
-                            <m:t>θ</m:t>
-                          </m:r>
-                          <m:d>
-                            <m:dPr>
-                              <m:begChr m:val="("/>
-                              <m:sepChr m:val=""/>
-                              <m:endChr m:val=")"/>
-                              <m:grow/>
-                            </m:dPr>
-                            <m:e>
-                              <m:r>
-                                <m:t>ω</m:t>
-                              </m:r>
-                            </m:e>
-                          </m:d>
-                        </m:e>
-                      </m:d>
+                      <m:r>
+                        <m:rPr>
+                          <m:sty m:val="p"/>
+                        </m:rPr>
+                        <m:t>(</m:t>
+                      </m:r>
+                      <m:r>
+                        <m:t>θ</m:t>
+                      </m:r>
+                      <m:r>
+                        <m:rPr>
+                          <m:sty m:val="p"/>
+                        </m:rPr>
+                        <m:t>(</m:t>
+                      </m:r>
+                      <m:r>
+                        <m:t>ω</m:t>
+                      </m:r>
+                      <m:r>
+                        <m:rPr>
+                          <m:sty m:val="p"/>
+                        </m:rPr>
+                        <m:t>)</m:t>
+                      </m:r>
+                      <m:r>
+                        <m:rPr>
+                          <m:sty m:val="p"/>
+                        </m:rPr>
+                        <m:t>)</m:t>
+                      </m:r>
                       <m:r>
                         <m:rPr>
                           <m:sty m:val="p"/>
                         </m:rPr>
                         <m:t>P</m:t>
                       </m:r>
-                      <m:d>
-                        <m:dPr>
-                          <m:begChr m:val="("/>
-                          <m:sepChr m:val=""/>
-                          <m:endChr m:val=")"/>
-                          <m:grow/>
-                        </m:dPr>
-                        <m:e>
-                          <m:r>
-                            <m:t>d</m:t>
-                          </m:r>
-                          <m:r>
-                            <m:t>ω</m:t>
-                          </m:r>
-                        </m:e>
-                      </m:d>
+                      <m:r>
+                        <m:rPr>
+                          <m:sty m:val="p"/>
+                        </m:rPr>
+                        <m:t>(</m:t>
+                      </m:r>
+                      <m:r>
+                        <m:t>d</m:t>
+                      </m:r>
+                      <m:r>
+                        <m:t>ω</m:t>
+                      </m:r>
+                      <m:r>
+                        <m:rPr>
+                          <m:sty m:val="p"/>
+                        </m:rPr>
+                        <m:t>)</m:t>
+                      </m:r>
                       <m:r>
                         <m:rPr>
                           <m:sty m:val="p"/>
@@ -4965,8 +5045,8 @@
                       </m:r>
                       <m:r>
                         <m:rPr>
+                          <m:scr m:val="script"/>
                           <m:sty m:val="p"/>
-                          <m:scr m:val="script"/>
                         </m:rPr>
                         <m:t>G</m:t>
                       </m:r>
@@ -4999,45 +5079,52 @@
                         </m:rPr>
                         <m:t>E</m:t>
                       </m:r>
-                      <m:d>
-                        <m:dPr>
-                          <m:begChr m:val="["/>
-                          <m:sepChr m:val=""/>
-                          <m:endChr m:val="]"/>
-                          <m:grow/>
-                        </m:dPr>
-                        <m:e>
-                          <m:r>
-                            <m:t>g</m:t>
-                          </m:r>
-                          <m:d>
-                            <m:dPr>
-                              <m:begChr m:val="("/>
-                              <m:sepChr m:val=""/>
-                              <m:endChr m:val=")"/>
-                              <m:grow/>
-                            </m:dPr>
-                            <m:e>
-                              <m:r>
-                                <m:t>Θ</m:t>
-                              </m:r>
-                            </m:e>
-                          </m:d>
-                          <m:r>
-                            <m:rPr>
-                              <m:sty m:val="p"/>
-                            </m:rPr>
-                            <m:t>|</m:t>
-                          </m:r>
-                          <m:r>
-                            <m:rPr>
-                              <m:sty m:val="p"/>
-                              <m:scr m:val="script"/>
-                            </m:rPr>
-                            <m:t>G</m:t>
-                          </m:r>
-                        </m:e>
-                      </m:d>
+                      <m:r>
+                        <m:rPr>
+                          <m:sty m:val="p"/>
+                        </m:rPr>
+                        <m:t>[</m:t>
+                      </m:r>
+                      <m:r>
+                        <m:t>g</m:t>
+                      </m:r>
+                      <m:r>
+                        <m:rPr>
+                          <m:sty m:val="p"/>
+                        </m:rPr>
+                        <m:t>(</m:t>
+                      </m:r>
+                      <m:r>
+                        <m:rPr>
+                          <m:sty m:val="p"/>
+                        </m:rPr>
+                        <m:t>Θ</m:t>
+                      </m:r>
+                      <m:r>
+                        <m:rPr>
+                          <m:sty m:val="p"/>
+                        </m:rPr>
+                        <m:t>)</m:t>
+                      </m:r>
+                      <m:r>
+                        <m:rPr>
+                          <m:sty m:val="p"/>
+                        </m:rPr>
+                        <m:t>|</m:t>
+                      </m:r>
+                      <m:r>
+                        <m:rPr>
+                          <m:scr m:val="script"/>
+                          <m:sty m:val="p"/>
+                        </m:rPr>
+                        <m:t>G</m:t>
+                      </m:r>
+                      <m:r>
+                        <m:rPr>
+                          <m:sty m:val="p"/>
+                        </m:rPr>
+                        <m:t>]</m:t>
+                      </m:r>
                       <m:r>
                         <m:rPr>
                           <m:sty m:val="p"/>
@@ -5097,28 +5184,33 @@
                       </m:rPr>
                       <m:t>P</m:t>
                     </m:r>
-                    <m:d>
-                      <m:dPr>
-                        <m:begChr m:val="["/>
-                        <m:sepChr m:val=""/>
-                        <m:endChr m:val="]"/>
-                        <m:grow/>
-                      </m:dPr>
-                      <m:e>
-                        <m:r>
-                          <m:t>B</m:t>
-                        </m:r>
-                        <m:r>
-                          <m:rPr>
-                            <m:sty m:val="p"/>
-                          </m:rPr>
-                          <m:t>|</m:t>
-                        </m:r>
-                        <m:r>
-                          <m:t>Θ</m:t>
-                        </m:r>
-                      </m:e>
-                    </m:d>
+                    <m:r>
+                      <m:rPr>
+                        <m:sty m:val="p"/>
+                      </m:rPr>
+                      <m:t>[</m:t>
+                    </m:r>
+                    <m:r>
+                      <m:t>B</m:t>
+                    </m:r>
+                    <m:r>
+                      <m:rPr>
+                        <m:sty m:val="p"/>
+                      </m:rPr>
+                      <m:t>|</m:t>
+                    </m:r>
+                    <m:r>
+                      <m:rPr>
+                        <m:sty m:val="p"/>
+                      </m:rPr>
+                      <m:t>Θ</m:t>
+                    </m:r>
+                    <m:r>
+                      <m:rPr>
+                        <m:sty m:val="p"/>
+                      </m:rPr>
+                      <m:t>]</m:t>
+                    </m:r>
                   </m:oMath>
                 </a14:m>
                 <a:r>
@@ -5127,32 +5219,37 @@
                 </a:r>
                 <a14:m>
                   <m:oMath xmlns:m="http://schemas.openxmlformats.org/officeDocument/2006/math">
-                    <m:d>
-                      <m:dPr>
-                        <m:begChr m:val="("/>
-                        <m:sepChr m:val=""/>
-                        <m:endChr m:val=")"/>
-                        <m:grow/>
-                      </m:dPr>
-                      <m:e>
-                        <m:r>
-                          <m:t>Ω</m:t>
-                        </m:r>
-                        <m:r>
-                          <m:rPr>
-                            <m:sty m:val="p"/>
-                          </m:rPr>
-                          <m:t>,</m:t>
-                        </m:r>
-                        <m:r>
-                          <m:rPr>
-                            <m:sty m:val="p"/>
-                            <m:scr m:val="script"/>
-                          </m:rPr>
-                          <m:t>G</m:t>
-                        </m:r>
-                      </m:e>
-                    </m:d>
+                    <m:r>
+                      <m:rPr>
+                        <m:sty m:val="p"/>
+                      </m:rPr>
+                      <m:t>(</m:t>
+                    </m:r>
+                    <m:r>
+                      <m:rPr>
+                        <m:sty m:val="p"/>
+                      </m:rPr>
+                      <m:t>Ω</m:t>
+                    </m:r>
+                    <m:r>
+                      <m:rPr>
+                        <m:sty m:val="p"/>
+                      </m:rPr>
+                      <m:t>,</m:t>
+                    </m:r>
+                    <m:r>
+                      <m:rPr>
+                        <m:scr m:val="script"/>
+                        <m:sty m:val="p"/>
+                      </m:rPr>
+                      <m:t>G</m:t>
+                    </m:r>
+                    <m:r>
+                      <m:rPr>
+                        <m:sty m:val="p"/>
+                      </m:rPr>
+                      <m:t>)</m:t>
+                    </m:r>
                   </m:oMath>
                 </a14:m>
                 <a:r>
@@ -5198,37 +5295,42 @@
                         </m:rPr>
                         <m:t>P</m:t>
                       </m:r>
-                      <m:d>
-                        <m:dPr>
-                          <m:begChr m:val="["/>
-                          <m:sepChr m:val=""/>
-                          <m:endChr m:val="]"/>
-                          <m:grow/>
-                        </m:dPr>
-                        <m:e>
-                          <m:r>
-                            <m:t>B</m:t>
-                          </m:r>
-                          <m:r>
-                            <m:rPr>
-                              <m:sty m:val="p"/>
-                            </m:rPr>
-                            <m:t>|</m:t>
-                          </m:r>
-                          <m:r>
-                            <m:t>Θ</m:t>
-                          </m:r>
-                          <m:r>
-                            <m:rPr>
-                              <m:sty m:val="p"/>
-                            </m:rPr>
-                            <m:t>=</m:t>
-                          </m:r>
-                          <m:r>
-                            <m:t>θ</m:t>
-                          </m:r>
-                        </m:e>
-                      </m:d>
+                      <m:r>
+                        <m:rPr>
+                          <m:sty m:val="p"/>
+                        </m:rPr>
+                        <m:t>[</m:t>
+                      </m:r>
+                      <m:r>
+                        <m:t>B</m:t>
+                      </m:r>
+                      <m:r>
+                        <m:rPr>
+                          <m:sty m:val="p"/>
+                        </m:rPr>
+                        <m:t>|</m:t>
+                      </m:r>
+                      <m:r>
+                        <m:rPr>
+                          <m:sty m:val="p"/>
+                        </m:rPr>
+                        <m:t>Θ</m:t>
+                      </m:r>
+                      <m:r>
+                        <m:rPr>
+                          <m:sty m:val="p"/>
+                        </m:rPr>
+                        <m:t>=</m:t>
+                      </m:r>
+                      <m:r>
+                        <m:t>θ</m:t>
+                      </m:r>
+                      <m:r>
+                        <m:rPr>
+                          <m:sty m:val="p"/>
+                        </m:rPr>
+                        <m:t>]</m:t>
+                      </m:r>
                       <m:r>
                         <m:rPr>
                           <m:sty m:val="p"/>
@@ -5258,47 +5360,51 @@
                           </m:r>
                         </m:e>
                       </m:nary>
-                      <m:d>
-                        <m:dPr>
-                          <m:begChr m:val="("/>
-                          <m:sepChr m:val=""/>
-                          <m:endChr m:val=")"/>
-                          <m:grow/>
-                        </m:dPr>
-                        <m:e>
-                          <m:r>
-                            <m:t>ω</m:t>
-                          </m:r>
-                          <m:r>
-                            <m:rPr>
-                              <m:sty m:val="p"/>
-                            </m:rPr>
-                            <m:t>|</m:t>
-                          </m:r>
-                          <m:r>
-                            <m:t>θ</m:t>
-                          </m:r>
-                        </m:e>
-                      </m:d>
+                      <m:r>
+                        <m:rPr>
+                          <m:sty m:val="p"/>
+                        </m:rPr>
+                        <m:t>(</m:t>
+                      </m:r>
+                      <m:r>
+                        <m:t>ω</m:t>
+                      </m:r>
+                      <m:r>
+                        <m:rPr>
+                          <m:sty m:val="p"/>
+                        </m:rPr>
+                        <m:t>|</m:t>
+                      </m:r>
+                      <m:r>
+                        <m:t>θ</m:t>
+                      </m:r>
+                      <m:r>
+                        <m:rPr>
+                          <m:sty m:val="p"/>
+                        </m:rPr>
+                        <m:t>)</m:t>
+                      </m:r>
                       <m:r>
                         <m:t>λ</m:t>
                       </m:r>
-                      <m:d>
-                        <m:dPr>
-                          <m:begChr m:val="("/>
-                          <m:sepChr m:val=""/>
-                          <m:endChr m:val=")"/>
-                          <m:grow/>
-                        </m:dPr>
-                        <m:e>
-                          <m:r>
-                            <m:t>d</m:t>
-                          </m:r>
-                          <m:r>
-                            <m:t>ω</m:t>
-                          </m:r>
-                        </m:e>
-                      </m:d>
+                      <m:r>
+                        <m:rPr>
+                          <m:sty m:val="p"/>
+                        </m:rPr>
+                        <m:t>(</m:t>
+                      </m:r>
+                      <m:r>
+                        <m:t>d</m:t>
+                      </m:r>
+                      <m:r>
+                        <m:t>ω</m:t>
+                      </m:r>
+                      <m:r>
+                        <m:rPr>
+                          <m:sty m:val="p"/>
+                        </m:rPr>
+                        <m:t>)</m:t>
+                      </m:r>
                       <m:r>
                         <m:rPr>
                           <m:sty m:val="p"/>
@@ -5328,279 +5434,281 @@
                       <m:jc m:val="center"/>
                     </m:oMathParaPr>
                     <m:oMath>
-                      <m:m>
-                        <m:mPr>
-                          <m:baseJc m:val="center"/>
-                          <m:plcHide m:val="on"/>
-                          <m:mcs>
-                            <m:mc>
-                              <m:mcPr>
-                                <m:mcJc m:val="right"/>
-                                <m:count m:val="1"/>
-                              </m:mcPr>
-                            </m:mc>
-                            <m:mc>
-                              <m:mcPr>
-                                <m:mcJc m:val="left"/>
-                                <m:count m:val="1"/>
-                              </m:mcPr>
-                            </m:mc>
-                          </m:mcs>
-                        </m:mPr>
-                        <m:mr>
-                          <m:e>
-                            <m:r>
-                              <m:rPr>
-                                <m:sty m:val="p"/>
-                              </m:rPr>
-                              <m:t>P</m:t>
-                            </m:r>
-                            <m:d>
-                              <m:dPr>
-                                <m:begChr m:val="["/>
-                                <m:sepChr m:val=""/>
-                                <m:endChr m:val="]"/>
-                                <m:grow/>
-                              </m:dPr>
-                              <m:e>
-                                <m:r>
-                                  <m:t>B</m:t>
-                                </m:r>
-                              </m:e>
-                            </m:d>
-                          </m:e>
-                          <m:e>
-                            <m:r>
-                              <m:rPr>
-                                <m:sty m:val="p"/>
-                              </m:rPr>
-                              <m:t>=</m:t>
-                            </m:r>
-                            <m:nary>
-                              <m:naryPr>
-                                <m:chr m:val="∫"/>
-                                <m:limLoc m:val="subSup"/>
-                                <m:subHide m:val="off"/>
-                                <m:supHide m:val="on"/>
-                              </m:naryPr>
-                              <m:sub>
-                                <m:r>
-                                  <m:rPr>
-                                    <m:sty m:val="p"/>
-                                    <m:scr m:val="double-struck"/>
-                                  </m:rPr>
-                                  <m:t>R</m:t>
-                                </m:r>
-                              </m:sub>
-                              <m:sup>
-                                <m:r>
-                                  <m:t>​</m:t>
-                                </m:r>
-                              </m:sup>
-                              <m:e>
-                                <m:r>
-                                  <m:rPr>
-                                    <m:sty m:val="p"/>
-                                  </m:rPr>
-                                  <m:t>P</m:t>
-                                </m:r>
-                              </m:e>
-                            </m:nary>
-                            <m:d>
-                              <m:dPr>
-                                <m:begChr m:val="["/>
-                                <m:sepChr m:val=""/>
-                                <m:endChr m:val="]"/>
-                                <m:grow/>
-                              </m:dPr>
-                              <m:e>
-                                <m:r>
-                                  <m:t>B</m:t>
-                                </m:r>
-                                <m:r>
-                                  <m:rPr>
-                                    <m:sty m:val="p"/>
-                                  </m:rPr>
-                                  <m:t>|</m:t>
-                                </m:r>
-                                <m:r>
-                                  <m:t>Θ</m:t>
-                                </m:r>
-                                <m:r>
-                                  <m:rPr>
-                                    <m:sty m:val="p"/>
-                                  </m:rPr>
-                                  <m:t>=</m:t>
-                                </m:r>
-                                <m:r>
-                                  <m:t>θ</m:t>
-                                </m:r>
-                              </m:e>
-                            </m:d>
-                            <m:sSup>
-                              <m:e>
-                                <m:r>
-                                  <m:rPr>
-                                    <m:sty m:val="p"/>
-                                  </m:rPr>
-                                  <m:t>P</m:t>
-                                </m:r>
-                              </m:e>
-                              <m:sup>
-                                <m:r>
-                                  <m:t>Θ</m:t>
-                                </m:r>
-                              </m:sup>
-                            </m:sSup>
-                            <m:d>
-                              <m:dPr>
-                                <m:begChr m:val="("/>
-                                <m:sepChr m:val=""/>
-                                <m:endChr m:val=")"/>
-                                <m:grow/>
-                              </m:dPr>
-                              <m:e>
-                                <m:r>
-                                  <m:t>d</m:t>
-                                </m:r>
-                                <m:r>
-                                  <m:t>θ</m:t>
-                                </m:r>
-                              </m:e>
-                            </m:d>
-                          </m:e>
-                        </m:mr>
-                        <m:mr>
-                          <m:e/>
-                          <m:e>
-                            <m:r>
-                              <m:rPr>
-                                <m:sty m:val="p"/>
-                              </m:rPr>
-                              <m:t>=</m:t>
-                            </m:r>
-                            <m:nary>
-                              <m:naryPr>
-                                <m:chr m:val="∫"/>
-                                <m:limLoc m:val="subSup"/>
-                                <m:subHide m:val="off"/>
-                                <m:supHide m:val="on"/>
-                              </m:naryPr>
-                              <m:sub>
-                                <m:r>
-                                  <m:t>B</m:t>
-                                </m:r>
-                              </m:sub>
-                              <m:sup>
-                                <m:r>
-                                  <m:t>​</m:t>
-                                </m:r>
-                              </m:sup>
-                              <m:e>
-                                <m:nary>
-                                  <m:naryPr>
-                                    <m:chr m:val="∫"/>
-                                    <m:limLoc m:val="subSup"/>
-                                    <m:subHide m:val="off"/>
-                                    <m:supHide m:val="on"/>
-                                  </m:naryPr>
-                                  <m:sub>
-                                    <m:r>
-                                      <m:rPr>
-                                        <m:sty m:val="p"/>
-                                        <m:scr m:val="double-struck"/>
-                                      </m:rPr>
-                                      <m:t>R</m:t>
-                                    </m:r>
-                                  </m:sub>
-                                  <m:sup>
-                                    <m:r>
-                                      <m:t>​</m:t>
-                                    </m:r>
-                                  </m:sup>
-                                  <m:e>
-                                    <m:r>
-                                      <m:t>p</m:t>
-                                    </m:r>
-                                  </m:e>
-                                </m:nary>
-                              </m:e>
-                            </m:nary>
-                            <m:d>
-                              <m:dPr>
-                                <m:begChr m:val="("/>
-                                <m:sepChr m:val=""/>
-                                <m:endChr m:val=")"/>
-                                <m:grow/>
-                              </m:dPr>
-                              <m:e>
-                                <m:r>
-                                  <m:t>ω</m:t>
-                                </m:r>
-                                <m:r>
-                                  <m:rPr>
-                                    <m:sty m:val="p"/>
-                                  </m:rPr>
-                                  <m:t>|</m:t>
-                                </m:r>
-                                <m:r>
-                                  <m:t>θ</m:t>
-                                </m:r>
-                              </m:e>
-                            </m:d>
-                            <m:sSup>
-                              <m:e>
-                                <m:r>
-                                  <m:rPr>
-                                    <m:sty m:val="p"/>
-                                  </m:rPr>
-                                  <m:t>P</m:t>
-                                </m:r>
-                              </m:e>
-                              <m:sup>
-                                <m:r>
-                                  <m:t>Θ</m:t>
-                                </m:r>
-                              </m:sup>
-                            </m:sSup>
-                            <m:d>
-                              <m:dPr>
-                                <m:begChr m:val="("/>
-                                <m:sepChr m:val=""/>
-                                <m:endChr m:val=")"/>
-                                <m:grow/>
-                              </m:dPr>
-                              <m:e>
-                                <m:r>
-                                  <m:t>d</m:t>
-                                </m:r>
-                                <m:r>
-                                  <m:t>θ</m:t>
-                                </m:r>
-                              </m:e>
-                            </m:d>
-                            <m:r>
-                              <m:t>λ</m:t>
-                            </m:r>
-                            <m:d>
-                              <m:dPr>
-                                <m:begChr m:val="("/>
-                                <m:sepChr m:val=""/>
-                                <m:endChr m:val=")"/>
-                                <m:grow/>
-                              </m:dPr>
-                              <m:e>
-                                <m:r>
-                                  <m:t>d</m:t>
-                                </m:r>
-                                <m:r>
-                                  <m:t>ω</m:t>
-                                </m:r>
-                              </m:e>
-                            </m:d>
-                          </m:e>
-                        </m:mr>
-                      </m:m>
+                      <m:eqArr>
+                        <m:e>
+                          <m:r>
+                            <m:rPr>
+                              <m:sty m:val="p"/>
+                            </m:rPr>
+                            <m:t>P</m:t>
+                          </m:r>
+                          <m:r>
+                            <m:rPr>
+                              <m:sty m:val="p"/>
+                            </m:rPr>
+                            <m:t>[</m:t>
+                          </m:r>
+                          <m:r>
+                            <m:t>B</m:t>
+                          </m:r>
+                          <m:r>
+                            <m:rPr>
+                              <m:sty m:val="p"/>
+                            </m:rPr>
+                            <m:t>]</m:t>
+                          </m:r>
+                          <m:r>
+                            <m:t>&amp;</m:t>
+                          </m:r>
+                          <m:r>
+                            <m:rPr>
+                              <m:sty m:val="p"/>
+                            </m:rPr>
+                            <m:t>=</m:t>
+                          </m:r>
+                          <m:nary>
+                            <m:naryPr>
+                              <m:chr m:val="∫"/>
+                              <m:limLoc m:val="subSup"/>
+                              <m:subHide m:val="off"/>
+                              <m:supHide m:val="on"/>
+                            </m:naryPr>
+                            <m:sub>
+                              <m:r>
+                                <m:rPr>
+                                  <m:scr m:val="double-struck"/>
+                                  <m:sty m:val="p"/>
+                                </m:rPr>
+                                <m:t>R</m:t>
+                              </m:r>
+                            </m:sub>
+                            <m:sup>
+                              <m:r>
+                                <m:t>​</m:t>
+                              </m:r>
+                            </m:sup>
+                            <m:e>
+                              <m:r>
+                                <m:rPr>
+                                  <m:sty m:val="p"/>
+                                </m:rPr>
+                                <m:t>P</m:t>
+                              </m:r>
+                            </m:e>
+                          </m:nary>
+                          <m:r>
+                            <m:rPr>
+                              <m:sty m:val="p"/>
+                            </m:rPr>
+                            <m:t>[</m:t>
+                          </m:r>
+                          <m:r>
+                            <m:t>B</m:t>
+                          </m:r>
+                          <m:r>
+                            <m:rPr>
+                              <m:sty m:val="p"/>
+                            </m:rPr>
+                            <m:t>|</m:t>
+                          </m:r>
+                          <m:r>
+                            <m:rPr>
+                              <m:sty m:val="p"/>
+                            </m:rPr>
+                            <m:t>Θ</m:t>
+                          </m:r>
+                          <m:r>
+                            <m:rPr>
+                              <m:sty m:val="p"/>
+                            </m:rPr>
+                            <m:t>=</m:t>
+                          </m:r>
+                          <m:r>
+                            <m:t>θ</m:t>
+                          </m:r>
+                          <m:r>
+                            <m:rPr>
+                              <m:sty m:val="p"/>
+                            </m:rPr>
+                            <m:t>]</m:t>
+                          </m:r>
+                          <m:sSup>
+                            <m:e>
+                              <m:r>
+                                <m:rPr>
+                                  <m:sty m:val="p"/>
+                                </m:rPr>
+                                <m:t>P</m:t>
+                              </m:r>
+                            </m:e>
+                            <m:sup>
+                              <m:r>
+                                <m:rPr>
+                                  <m:sty m:val="p"/>
+                                </m:rPr>
+                                <m:t>Θ</m:t>
+                              </m:r>
+                            </m:sup>
+                          </m:sSup>
+                          <m:r>
+                            <m:rPr>
+                              <m:sty m:val="p"/>
+                            </m:rPr>
+                            <m:t>(</m:t>
+                          </m:r>
+                          <m:r>
+                            <m:t>d</m:t>
+                          </m:r>
+                          <m:r>
+                            <m:t>θ</m:t>
+                          </m:r>
+                          <m:r>
+                            <m:rPr>
+                              <m:sty m:val="p"/>
+                            </m:rPr>
+                            <m:t>)</m:t>
+                          </m:r>
+                        </m:e>
+                        <m:e>
+                          <m:r>
+                            <m:t>&amp;</m:t>
+                          </m:r>
+                          <m:r>
+                            <m:rPr>
+                              <m:sty m:val="p"/>
+                            </m:rPr>
+                            <m:t>=</m:t>
+                          </m:r>
+                          <m:nary>
+                            <m:naryPr>
+                              <m:chr m:val="∫"/>
+                              <m:limLoc m:val="subSup"/>
+                              <m:subHide m:val="off"/>
+                              <m:supHide m:val="on"/>
+                            </m:naryPr>
+                            <m:sub>
+                              <m:r>
+                                <m:t>B</m:t>
+                              </m:r>
+                            </m:sub>
+                            <m:sup>
+                              <m:r>
+                                <m:t>​</m:t>
+                              </m:r>
+                            </m:sup>
+                            <m:e>
+                              <m:nary>
+                                <m:naryPr>
+                                  <m:chr m:val="∫"/>
+                                  <m:limLoc m:val="subSup"/>
+                                  <m:subHide m:val="off"/>
+                                  <m:supHide m:val="on"/>
+                                </m:naryPr>
+                                <m:sub>
+                                  <m:r>
+                                    <m:rPr>
+                                      <m:scr m:val="double-struck"/>
+                                      <m:sty m:val="p"/>
+                                    </m:rPr>
+                                    <m:t>R</m:t>
+                                  </m:r>
+                                </m:sub>
+                                <m:sup>
+                                  <m:r>
+                                    <m:t>​</m:t>
+                                  </m:r>
+                                </m:sup>
+                                <m:e>
+                                  <m:r>
+                                    <m:t>p</m:t>
+                                  </m:r>
+                                </m:e>
+                              </m:nary>
+                            </m:e>
+                          </m:nary>
+                          <m:r>
+                            <m:rPr>
+                              <m:sty m:val="p"/>
+                            </m:rPr>
+                            <m:t>(</m:t>
+                          </m:r>
+                          <m:r>
+                            <m:t>ω</m:t>
+                          </m:r>
+                          <m:r>
+                            <m:rPr>
+                              <m:sty m:val="p"/>
+                            </m:rPr>
+                            <m:t>|</m:t>
+                          </m:r>
+                          <m:r>
+                            <m:t>θ</m:t>
+                          </m:r>
+                          <m:r>
+                            <m:rPr>
+                              <m:sty m:val="p"/>
+                            </m:rPr>
+                            <m:t>)</m:t>
+                          </m:r>
+                          <m:sSup>
+                            <m:e>
+                              <m:r>
+                                <m:rPr>
+                                  <m:sty m:val="p"/>
+                                </m:rPr>
+                                <m:t>P</m:t>
+                              </m:r>
+                            </m:e>
+                            <m:sup>
+                              <m:r>
+                                <m:rPr>
+                                  <m:sty m:val="p"/>
+                                </m:rPr>
+                                <m:t>Θ</m:t>
+                              </m:r>
+                            </m:sup>
+                          </m:sSup>
+                          <m:r>
+                            <m:rPr>
+                              <m:sty m:val="p"/>
+                            </m:rPr>
+                            <m:t>(</m:t>
+                          </m:r>
+                          <m:r>
+                            <m:t>d</m:t>
+                          </m:r>
+                          <m:r>
+                            <m:t>θ</m:t>
+                          </m:r>
+                          <m:r>
+                            <m:rPr>
+                              <m:sty m:val="p"/>
+                            </m:rPr>
+                            <m:t>)</m:t>
+                          </m:r>
+                          <m:r>
+                            <m:t>λ</m:t>
+                          </m:r>
+                          <m:r>
+                            <m:rPr>
+                              <m:sty m:val="p"/>
+                            </m:rPr>
+                            <m:t>(</m:t>
+                          </m:r>
+                          <m:r>
+                            <m:t>d</m:t>
+                          </m:r>
+                          <m:r>
+                            <m:t>ω</m:t>
+                          </m:r>
+                          <m:r>
+                            <m:rPr>
+                              <m:sty m:val="p"/>
+                            </m:rPr>
+                            <m:t>)</m:t>
+                          </m:r>
+                        </m:e>
+                      </m:eqArr>
                     </m:oMath>
                   </m:oMathPara>
                 </a14:m>
@@ -5615,410 +5723,430 @@
                       <m:jc m:val="center"/>
                     </m:oMathParaPr>
                     <m:oMath>
-                      <m:m>
-                        <m:mPr>
-                          <m:baseJc m:val="center"/>
-                          <m:plcHide m:val="on"/>
-                          <m:mcs>
-                            <m:mc>
-                              <m:mcPr>
-                                <m:mcJc m:val="right"/>
-                                <m:count m:val="1"/>
-                              </m:mcPr>
-                            </m:mc>
-                            <m:mc>
-                              <m:mcPr>
-                                <m:mcJc m:val="left"/>
-                                <m:count m:val="1"/>
-                              </m:mcPr>
-                            </m:mc>
-                          </m:mcs>
-                        </m:mPr>
-                        <m:mr>
-                          <m:e>
-                            <m:r>
-                              <m:rPr>
-                                <m:sty m:val="p"/>
-                              </m:rPr>
-                              <m:t>Q</m:t>
-                            </m:r>
-                            <m:d>
-                              <m:dPr>
-                                <m:begChr m:val="["/>
-                                <m:sepChr m:val=""/>
-                                <m:endChr m:val="]"/>
-                                <m:grow/>
-                              </m:dPr>
-                              <m:e>
-                                <m:r>
-                                  <m:t>B</m:t>
-                                </m:r>
-                              </m:e>
-                            </m:d>
-                          </m:e>
-                          <m:e>
-                            <m:r>
-                              <m:rPr>
-                                <m:sty m:val="p"/>
-                              </m:rPr>
-                              <m:t>=</m:t>
-                            </m:r>
-                            <m:r>
-                              <m:rPr>
-                                <m:sty m:val="p"/>
-                              </m:rPr>
-                              <m:t>E</m:t>
-                            </m:r>
-                            <m:d>
-                              <m:dPr>
-                                <m:begChr m:val="["/>
-                                <m:sepChr m:val=""/>
-                                <m:endChr m:val="]"/>
-                                <m:grow/>
-                              </m:dPr>
-                              <m:e>
-                                <m:r>
-                                  <m:t>g</m:t>
-                                </m:r>
-                                <m:d>
-                                  <m:dPr>
-                                    <m:begChr m:val="("/>
-                                    <m:sepChr m:val=""/>
-                                    <m:endChr m:val=")"/>
-                                    <m:grow/>
-                                  </m:dPr>
-                                  <m:e>
-                                    <m:r>
-                                      <m:t>Θ</m:t>
-                                    </m:r>
-                                  </m:e>
-                                </m:d>
-                                <m:r>
-                                  <m:rPr>
-                                    <m:sty m:val="p"/>
-                                  </m:rPr>
-                                  <m:t>E</m:t>
-                                </m:r>
-                                <m:d>
-                                  <m:dPr>
-                                    <m:begChr m:val="["/>
-                                    <m:sepChr m:val=""/>
-                                    <m:endChr m:val="]"/>
-                                    <m:grow/>
-                                  </m:dPr>
-                                  <m:e>
-                                    <m:sSub>
-                                      <m:e>
-                                        <m:r>
-                                          <m:t>1</m:t>
-                                        </m:r>
-                                      </m:e>
-                                      <m:sub>
-                                        <m:r>
-                                          <m:t>B</m:t>
-                                        </m:r>
-                                      </m:sub>
-                                    </m:sSub>
-                                    <m:r>
-                                      <m:rPr>
-                                        <m:sty m:val="p"/>
-                                      </m:rPr>
-                                      <m:t>|</m:t>
-                                    </m:r>
-                                    <m:r>
-                                      <m:t>σ</m:t>
-                                    </m:r>
-                                    <m:d>
-                                      <m:dPr>
-                                        <m:begChr m:val="["/>
-                                        <m:sepChr m:val=""/>
-                                        <m:endChr m:val="]"/>
-                                        <m:grow/>
-                                      </m:dPr>
-                                      <m:e>
-                                        <m:r>
-                                          <m:t>Θ</m:t>
-                                        </m:r>
-                                      </m:e>
-                                    </m:d>
-                                  </m:e>
-                                </m:d>
-                              </m:e>
-                            </m:d>
-                          </m:e>
-                        </m:mr>
-                        <m:mr>
-                          <m:e/>
-                          <m:e>
-                            <m:r>
-                              <m:rPr>
-                                <m:sty m:val="p"/>
-                              </m:rPr>
-                              <m:t>=</m:t>
-                            </m:r>
-                            <m:nary>
-                              <m:naryPr>
-                                <m:chr m:val="∫"/>
-                                <m:limLoc m:val="subSup"/>
-                                <m:subHide m:val="off"/>
-                                <m:supHide m:val="on"/>
-                              </m:naryPr>
-                              <m:sub>
-                                <m:r>
-                                  <m:rPr>
-                                    <m:sty m:val="p"/>
-                                    <m:scr m:val="double-struck"/>
-                                  </m:rPr>
-                                  <m:t>R</m:t>
-                                </m:r>
-                              </m:sub>
-                              <m:sup>
-                                <m:r>
-                                  <m:t>​</m:t>
-                                </m:r>
-                              </m:sup>
-                              <m:e>
-                                <m:r>
-                                  <m:t>g</m:t>
-                                </m:r>
-                              </m:e>
-                            </m:nary>
-                            <m:d>
-                              <m:dPr>
-                                <m:begChr m:val="("/>
-                                <m:sepChr m:val=""/>
-                                <m:endChr m:val=")"/>
-                                <m:grow/>
-                              </m:dPr>
-                              <m:e>
-                                <m:r>
-                                  <m:t>θ</m:t>
-                                </m:r>
-                              </m:e>
-                            </m:d>
-                            <m:r>
-                              <m:rPr>
-                                <m:sty m:val="p"/>
-                              </m:rPr>
-                              <m:t>P</m:t>
-                            </m:r>
-                            <m:d>
-                              <m:dPr>
-                                <m:begChr m:val="["/>
-                                <m:sepChr m:val=""/>
-                                <m:endChr m:val="]"/>
-                                <m:grow/>
-                              </m:dPr>
-                              <m:e>
-                                <m:r>
-                                  <m:t>B</m:t>
-                                </m:r>
-                                <m:r>
-                                  <m:rPr>
-                                    <m:sty m:val="p"/>
-                                  </m:rPr>
-                                  <m:t>|</m:t>
-                                </m:r>
-                                <m:r>
-                                  <m:t>Θ</m:t>
-                                </m:r>
-                                <m:r>
-                                  <m:rPr>
-                                    <m:sty m:val="p"/>
-                                  </m:rPr>
-                                  <m:t>=</m:t>
-                                </m:r>
-                                <m:r>
-                                  <m:t>θ</m:t>
-                                </m:r>
-                              </m:e>
-                            </m:d>
-                            <m:sSup>
-                              <m:e>
-                                <m:r>
-                                  <m:rPr>
-                                    <m:sty m:val="p"/>
-                                  </m:rPr>
-                                  <m:t>P</m:t>
-                                </m:r>
-                              </m:e>
-                              <m:sup>
-                                <m:r>
-                                  <m:t>Θ</m:t>
-                                </m:r>
-                              </m:sup>
-                            </m:sSup>
-                            <m:d>
-                              <m:dPr>
-                                <m:begChr m:val="("/>
-                                <m:sepChr m:val=""/>
-                                <m:endChr m:val=")"/>
-                                <m:grow/>
-                              </m:dPr>
-                              <m:e>
-                                <m:r>
-                                  <m:t>d</m:t>
-                                </m:r>
-                                <m:r>
-                                  <m:t>θ</m:t>
-                                </m:r>
-                              </m:e>
-                            </m:d>
-                          </m:e>
-                        </m:mr>
-                        <m:mr>
-                          <m:e/>
-                          <m:e>
-                            <m:r>
-                              <m:rPr>
-                                <m:sty m:val="p"/>
-                              </m:rPr>
-                              <m:t>=</m:t>
-                            </m:r>
-                            <m:nary>
-                              <m:naryPr>
-                                <m:chr m:val="∫"/>
-                                <m:limLoc m:val="subSup"/>
-                                <m:subHide m:val="off"/>
-                                <m:supHide m:val="on"/>
-                              </m:naryPr>
-                              <m:sub>
-                                <m:r>
-                                  <m:t>B</m:t>
-                                </m:r>
-                              </m:sub>
-                              <m:sup>
-                                <m:r>
-                                  <m:t>​</m:t>
-                                </m:r>
-                              </m:sup>
-                              <m:e>
-                                <m:nary>
-                                  <m:naryPr>
-                                    <m:chr m:val="∫"/>
-                                    <m:limLoc m:val="subSup"/>
-                                    <m:subHide m:val="off"/>
-                                    <m:supHide m:val="on"/>
-                                  </m:naryPr>
-                                  <m:sub>
-                                    <m:r>
-                                      <m:rPr>
-                                        <m:sty m:val="p"/>
-                                        <m:scr m:val="double-struck"/>
-                                      </m:rPr>
-                                      <m:t>R</m:t>
-                                    </m:r>
-                                  </m:sub>
-                                  <m:sup>
-                                    <m:r>
-                                      <m:t>​</m:t>
-                                    </m:r>
-                                  </m:sup>
-                                  <m:e>
-                                    <m:r>
-                                      <m:t>g</m:t>
-                                    </m:r>
-                                  </m:e>
-                                </m:nary>
-                              </m:e>
-                            </m:nary>
-                            <m:d>
-                              <m:dPr>
-                                <m:begChr m:val="("/>
-                                <m:sepChr m:val=""/>
-                                <m:endChr m:val=")"/>
-                                <m:grow/>
-                              </m:dPr>
-                              <m:e>
-                                <m:r>
-                                  <m:t>θ</m:t>
-                                </m:r>
-                              </m:e>
-                            </m:d>
-                            <m:r>
-                              <m:t>p</m:t>
-                            </m:r>
-                            <m:d>
-                              <m:dPr>
-                                <m:begChr m:val="("/>
-                                <m:sepChr m:val=""/>
-                                <m:endChr m:val=")"/>
-                                <m:grow/>
-                              </m:dPr>
-                              <m:e>
-                                <m:r>
-                                  <m:t>ω</m:t>
-                                </m:r>
-                                <m:r>
-                                  <m:rPr>
-                                    <m:sty m:val="p"/>
-                                  </m:rPr>
-                                  <m:t>|</m:t>
-                                </m:r>
-                                <m:r>
-                                  <m:t>θ</m:t>
-                                </m:r>
-                              </m:e>
-                            </m:d>
-                            <m:sSup>
-                              <m:e>
-                                <m:r>
-                                  <m:rPr>
-                                    <m:sty m:val="p"/>
-                                  </m:rPr>
-                                  <m:t>P</m:t>
-                                </m:r>
-                              </m:e>
-                              <m:sup>
-                                <m:r>
-                                  <m:t>Θ</m:t>
-                                </m:r>
-                              </m:sup>
-                            </m:sSup>
-                            <m:d>
-                              <m:dPr>
-                                <m:begChr m:val="("/>
-                                <m:sepChr m:val=""/>
-                                <m:endChr m:val=")"/>
-                                <m:grow/>
-                              </m:dPr>
-                              <m:e>
-                                <m:r>
-                                  <m:t>d</m:t>
-                                </m:r>
-                                <m:r>
-                                  <m:t>θ</m:t>
-                                </m:r>
-                              </m:e>
-                            </m:d>
-                            <m:r>
-                              <m:t>λ</m:t>
-                            </m:r>
-                            <m:d>
-                              <m:dPr>
-                                <m:begChr m:val="("/>
-                                <m:sepChr m:val=""/>
-                                <m:endChr m:val=")"/>
-                                <m:grow/>
-                              </m:dPr>
-                              <m:e>
-                                <m:r>
-                                  <m:t>d</m:t>
-                                </m:r>
-                                <m:r>
-                                  <m:t>ω</m:t>
-                                </m:r>
-                              </m:e>
-                            </m:d>
-                            <m:r>
-                              <m:rPr>
-                                <m:sty m:val="p"/>
-                              </m:rPr>
-                              <m:t>.</m:t>
-                            </m:r>
-                          </m:e>
-                        </m:mr>
-                      </m:m>
+                      <m:eqArr>
+                        <m:e>
+                          <m:r>
+                            <m:rPr>
+                              <m:sty m:val="p"/>
+                            </m:rPr>
+                            <m:t>Q</m:t>
+                          </m:r>
+                          <m:r>
+                            <m:rPr>
+                              <m:sty m:val="p"/>
+                            </m:rPr>
+                            <m:t>[</m:t>
+                          </m:r>
+                          <m:r>
+                            <m:t>B</m:t>
+                          </m:r>
+                          <m:r>
+                            <m:rPr>
+                              <m:sty m:val="p"/>
+                            </m:rPr>
+                            <m:t>]</m:t>
+                          </m:r>
+                          <m:r>
+                            <m:t>&amp;</m:t>
+                          </m:r>
+                          <m:r>
+                            <m:rPr>
+                              <m:sty m:val="p"/>
+                            </m:rPr>
+                            <m:t>=</m:t>
+                          </m:r>
+                          <m:r>
+                            <m:rPr>
+                              <m:sty m:val="p"/>
+                            </m:rPr>
+                            <m:t>E</m:t>
+                          </m:r>
+                          <m:r>
+                            <m:rPr>
+                              <m:sty m:val="p"/>
+                            </m:rPr>
+                            <m:t>[</m:t>
+                          </m:r>
+                          <m:r>
+                            <m:t>g</m:t>
+                          </m:r>
+                          <m:r>
+                            <m:rPr>
+                              <m:sty m:val="p"/>
+                            </m:rPr>
+                            <m:t>(</m:t>
+                          </m:r>
+                          <m:r>
+                            <m:rPr>
+                              <m:sty m:val="p"/>
+                            </m:rPr>
+                            <m:t>Θ</m:t>
+                          </m:r>
+                          <m:r>
+                            <m:rPr>
+                              <m:sty m:val="p"/>
+                            </m:rPr>
+                            <m:t>)</m:t>
+                          </m:r>
+                          <m:r>
+                            <m:rPr>
+                              <m:sty m:val="p"/>
+                            </m:rPr>
+                            <m:t>E</m:t>
+                          </m:r>
+                          <m:r>
+                            <m:rPr>
+                              <m:sty m:val="p"/>
+                            </m:rPr>
+                            <m:t>[</m:t>
+                          </m:r>
+                          <m:sSub>
+                            <m:e>
+                              <m:r>
+                                <m:t>1</m:t>
+                              </m:r>
+                            </m:e>
+                            <m:sub>
+                              <m:r>
+                                <m:t>B</m:t>
+                              </m:r>
+                            </m:sub>
+                          </m:sSub>
+                          <m:r>
+                            <m:rPr>
+                              <m:sty m:val="p"/>
+                            </m:rPr>
+                            <m:t>|</m:t>
+                          </m:r>
+                          <m:r>
+                            <m:t>σ</m:t>
+                          </m:r>
+                          <m:r>
+                            <m:rPr>
+                              <m:sty m:val="p"/>
+                            </m:rPr>
+                            <m:t>[</m:t>
+                          </m:r>
+                          <m:r>
+                            <m:rPr>
+                              <m:sty m:val="p"/>
+                            </m:rPr>
+                            <m:t>Θ</m:t>
+                          </m:r>
+                          <m:r>
+                            <m:rPr>
+                              <m:sty m:val="p"/>
+                            </m:rPr>
+                            <m:t>]</m:t>
+                          </m:r>
+                          <m:r>
+                            <m:rPr>
+                              <m:sty m:val="p"/>
+                            </m:rPr>
+                            <m:t>]</m:t>
+                          </m:r>
+                          <m:r>
+                            <m:rPr>
+                              <m:sty m:val="p"/>
+                            </m:rPr>
+                            <m:t>]</m:t>
+                          </m:r>
+                        </m:e>
+                        <m:e>
+                          <m:r>
+                            <m:t>&amp;</m:t>
+                          </m:r>
+                          <m:r>
+                            <m:rPr>
+                              <m:sty m:val="p"/>
+                            </m:rPr>
+                            <m:t>=</m:t>
+                          </m:r>
+                          <m:nary>
+                            <m:naryPr>
+                              <m:chr m:val="∫"/>
+                              <m:limLoc m:val="subSup"/>
+                              <m:subHide m:val="off"/>
+                              <m:supHide m:val="on"/>
+                            </m:naryPr>
+                            <m:sub>
+                              <m:r>
+                                <m:rPr>
+                                  <m:scr m:val="double-struck"/>
+                                  <m:sty m:val="p"/>
+                                </m:rPr>
+                                <m:t>R</m:t>
+                              </m:r>
+                            </m:sub>
+                            <m:sup>
+                              <m:r>
+                                <m:t>​</m:t>
+                              </m:r>
+                            </m:sup>
+                            <m:e>
+                              <m:r>
+                                <m:t>g</m:t>
+                              </m:r>
+                            </m:e>
+                          </m:nary>
+                          <m:r>
+                            <m:rPr>
+                              <m:sty m:val="p"/>
+                            </m:rPr>
+                            <m:t>(</m:t>
+                          </m:r>
+                          <m:r>
+                            <m:t>θ</m:t>
+                          </m:r>
+                          <m:r>
+                            <m:rPr>
+                              <m:sty m:val="p"/>
+                            </m:rPr>
+                            <m:t>)</m:t>
+                          </m:r>
+                          <m:r>
+                            <m:rPr>
+                              <m:sty m:val="p"/>
+                            </m:rPr>
+                            <m:t>P</m:t>
+                          </m:r>
+                          <m:r>
+                            <m:rPr>
+                              <m:sty m:val="p"/>
+                            </m:rPr>
+                            <m:t>[</m:t>
+                          </m:r>
+                          <m:r>
+                            <m:t>B</m:t>
+                          </m:r>
+                          <m:r>
+                            <m:rPr>
+                              <m:sty m:val="p"/>
+                            </m:rPr>
+                            <m:t>|</m:t>
+                          </m:r>
+                          <m:r>
+                            <m:rPr>
+                              <m:sty m:val="p"/>
+                            </m:rPr>
+                            <m:t>Θ</m:t>
+                          </m:r>
+                          <m:r>
+                            <m:rPr>
+                              <m:sty m:val="p"/>
+                            </m:rPr>
+                            <m:t>=</m:t>
+                          </m:r>
+                          <m:r>
+                            <m:t>θ</m:t>
+                          </m:r>
+                          <m:r>
+                            <m:rPr>
+                              <m:sty m:val="p"/>
+                            </m:rPr>
+                            <m:t>]</m:t>
+                          </m:r>
+                          <m:sSup>
+                            <m:e>
+                              <m:r>
+                                <m:rPr>
+                                  <m:sty m:val="p"/>
+                                </m:rPr>
+                                <m:t>P</m:t>
+                              </m:r>
+                            </m:e>
+                            <m:sup>
+                              <m:r>
+                                <m:rPr>
+                                  <m:sty m:val="p"/>
+                                </m:rPr>
+                                <m:t>Θ</m:t>
+                              </m:r>
+                            </m:sup>
+                          </m:sSup>
+                          <m:r>
+                            <m:rPr>
+                              <m:sty m:val="p"/>
+                            </m:rPr>
+                            <m:t>(</m:t>
+                          </m:r>
+                          <m:r>
+                            <m:t>d</m:t>
+                          </m:r>
+                          <m:r>
+                            <m:t>θ</m:t>
+                          </m:r>
+                          <m:r>
+                            <m:rPr>
+                              <m:sty m:val="p"/>
+                            </m:rPr>
+                            <m:t>)</m:t>
+                          </m:r>
+                        </m:e>
+                        <m:e>
+                          <m:r>
+                            <m:t>&amp;</m:t>
+                          </m:r>
+                          <m:r>
+                            <m:rPr>
+                              <m:sty m:val="p"/>
+                            </m:rPr>
+                            <m:t>=</m:t>
+                          </m:r>
+                          <m:nary>
+                            <m:naryPr>
+                              <m:chr m:val="∫"/>
+                              <m:limLoc m:val="subSup"/>
+                              <m:subHide m:val="off"/>
+                              <m:supHide m:val="on"/>
+                            </m:naryPr>
+                            <m:sub>
+                              <m:r>
+                                <m:t>B</m:t>
+                              </m:r>
+                            </m:sub>
+                            <m:sup>
+                              <m:r>
+                                <m:t>​</m:t>
+                              </m:r>
+                            </m:sup>
+                            <m:e>
+                              <m:nary>
+                                <m:naryPr>
+                                  <m:chr m:val="∫"/>
+                                  <m:limLoc m:val="subSup"/>
+                                  <m:subHide m:val="off"/>
+                                  <m:supHide m:val="on"/>
+                                </m:naryPr>
+                                <m:sub>
+                                  <m:r>
+                                    <m:rPr>
+                                      <m:scr m:val="double-struck"/>
+                                      <m:sty m:val="p"/>
+                                    </m:rPr>
+                                    <m:t>R</m:t>
+                                  </m:r>
+                                </m:sub>
+                                <m:sup>
+                                  <m:r>
+                                    <m:t>​</m:t>
+                                  </m:r>
+                                </m:sup>
+                                <m:e>
+                                  <m:r>
+                                    <m:t>g</m:t>
+                                  </m:r>
+                                </m:e>
+                              </m:nary>
+                            </m:e>
+                          </m:nary>
+                          <m:r>
+                            <m:rPr>
+                              <m:sty m:val="p"/>
+                            </m:rPr>
+                            <m:t>(</m:t>
+                          </m:r>
+                          <m:r>
+                            <m:t>θ</m:t>
+                          </m:r>
+                          <m:r>
+                            <m:rPr>
+                              <m:sty m:val="p"/>
+                            </m:rPr>
+                            <m:t>)</m:t>
+                          </m:r>
+                          <m:r>
+                            <m:t>p</m:t>
+                          </m:r>
+                          <m:r>
+                            <m:rPr>
+                              <m:sty m:val="p"/>
+                            </m:rPr>
+                            <m:t>(</m:t>
+                          </m:r>
+                          <m:r>
+                            <m:t>ω</m:t>
+                          </m:r>
+                          <m:r>
+                            <m:rPr>
+                              <m:sty m:val="p"/>
+                            </m:rPr>
+                            <m:t>|</m:t>
+                          </m:r>
+                          <m:r>
+                            <m:t>θ</m:t>
+                          </m:r>
+                          <m:r>
+                            <m:rPr>
+                              <m:sty m:val="p"/>
+                            </m:rPr>
+                            <m:t>)</m:t>
+                          </m:r>
+                          <m:sSup>
+                            <m:e>
+                              <m:r>
+                                <m:rPr>
+                                  <m:sty m:val="p"/>
+                                </m:rPr>
+                                <m:t>P</m:t>
+                              </m:r>
+                            </m:e>
+                            <m:sup>
+                              <m:r>
+                                <m:rPr>
+                                  <m:sty m:val="p"/>
+                                </m:rPr>
+                                <m:t>Θ</m:t>
+                              </m:r>
+                            </m:sup>
+                          </m:sSup>
+                          <m:r>
+                            <m:rPr>
+                              <m:sty m:val="p"/>
+                            </m:rPr>
+                            <m:t>(</m:t>
+                          </m:r>
+                          <m:r>
+                            <m:t>d</m:t>
+                          </m:r>
+                          <m:r>
+                            <m:t>θ</m:t>
+                          </m:r>
+                          <m:r>
+                            <m:rPr>
+                              <m:sty m:val="p"/>
+                            </m:rPr>
+                            <m:t>)</m:t>
+                          </m:r>
+                          <m:r>
+                            <m:t>λ</m:t>
+                          </m:r>
+                          <m:r>
+                            <m:rPr>
+                              <m:sty m:val="p"/>
+                            </m:rPr>
+                            <m:t>(</m:t>
+                          </m:r>
+                          <m:r>
+                            <m:t>d</m:t>
+                          </m:r>
+                          <m:r>
+                            <m:t>ω</m:t>
+                          </m:r>
+                          <m:r>
+                            <m:rPr>
+                              <m:sty m:val="p"/>
+                            </m:rPr>
+                            <m:t>)</m:t>
+                          </m:r>
+                          <m:r>
+                            <m:rPr>
+                              <m:sty m:val="p"/>
+                            </m:rPr>
+                            <m:t>.</m:t>
+                          </m:r>
+                        </m:e>
+                      </m:eqArr>
                     </m:oMath>
                   </m:oMathPara>
                 </a14:m>
@@ -6297,28 +6425,30 @@
                       <m:r>
                         <m:t>p</m:t>
                       </m:r>
-                      <m:d>
-                        <m:dPr>
-                          <m:begChr m:val="("/>
-                          <m:sepChr m:val=""/>
-                          <m:endChr m:val=")"/>
-                          <m:grow/>
-                        </m:dPr>
-                        <m:e>
-                          <m:r>
-                            <m:t>θ</m:t>
-                          </m:r>
-                          <m:r>
-                            <m:rPr>
-                              <m:sty m:val="p"/>
-                            </m:rPr>
-                            <m:t>|</m:t>
-                          </m:r>
-                          <m:r>
-                            <m:t>x</m:t>
-                          </m:r>
-                        </m:e>
-                      </m:d>
+                      <m:r>
+                        <m:rPr>
+                          <m:sty m:val="p"/>
+                        </m:rPr>
+                        <m:t>(</m:t>
+                      </m:r>
+                      <m:r>
+                        <m:t>θ</m:t>
+                      </m:r>
+                      <m:r>
+                        <m:rPr>
+                          <m:sty m:val="p"/>
+                        </m:rPr>
+                        <m:t>|</m:t>
+                      </m:r>
+                      <m:r>
+                        <m:t>x</m:t>
+                      </m:r>
+                      <m:r>
+                        <m:rPr>
+                          <m:sty m:val="p"/>
+                        </m:rPr>
+                        <m:t>)</m:t>
+                      </m:r>
                       <m:r>
                         <m:rPr>
                           <m:sty m:val="p"/>
@@ -6333,44 +6463,48 @@
                           <m:r>
                             <m:t>p</m:t>
                           </m:r>
-                          <m:d>
-                            <m:dPr>
-                              <m:begChr m:val="("/>
-                              <m:sepChr m:val=""/>
-                              <m:endChr m:val=")"/>
-                              <m:grow/>
-                            </m:dPr>
-                            <m:e>
-                              <m:r>
-                                <m:t>x</m:t>
-                              </m:r>
-                              <m:r>
-                                <m:rPr>
-                                  <m:sty m:val="p"/>
-                                </m:rPr>
-                                <m:t>|</m:t>
-                              </m:r>
-                              <m:r>
-                                <m:t>θ</m:t>
-                              </m:r>
-                            </m:e>
-                          </m:d>
+                          <m:r>
+                            <m:rPr>
+                              <m:sty m:val="p"/>
+                            </m:rPr>
+                            <m:t>(</m:t>
+                          </m:r>
+                          <m:r>
+                            <m:t>x</m:t>
+                          </m:r>
+                          <m:r>
+                            <m:rPr>
+                              <m:sty m:val="p"/>
+                            </m:rPr>
+                            <m:t>|</m:t>
+                          </m:r>
+                          <m:r>
+                            <m:t>θ</m:t>
+                          </m:r>
+                          <m:r>
+                            <m:rPr>
+                              <m:sty m:val="p"/>
+                            </m:rPr>
+                            <m:t>)</m:t>
+                          </m:r>
                           <m:r>
                             <m:t>p</m:t>
                           </m:r>
-                          <m:d>
-                            <m:dPr>
-                              <m:begChr m:val="("/>
-                              <m:sepChr m:val=""/>
-                              <m:endChr m:val=")"/>
-                              <m:grow/>
-                            </m:dPr>
-                            <m:e>
-                              <m:r>
-                                <m:t>θ</m:t>
-                              </m:r>
-                            </m:e>
-                          </m:d>
+                          <m:r>
+                            <m:rPr>
+                              <m:sty m:val="p"/>
+                            </m:rPr>
+                            <m:t>(</m:t>
+                          </m:r>
+                          <m:r>
+                            <m:t>θ</m:t>
+                          </m:r>
+                          <m:r>
+                            <m:rPr>
+                              <m:sty m:val="p"/>
+                            </m:rPr>
+                            <m:t>)</m:t>
+                          </m:r>
                         </m:num>
                         <m:den>
                           <m:nary>
@@ -6382,6 +6516,9 @@
                             </m:naryPr>
                             <m:sub>
                               <m:r>
+                                <m:rPr>
+                                  <m:sty m:val="p"/>
+                                </m:rPr>
                                 <m:t>Θ</m:t>
                               </m:r>
                             </m:sub>
@@ -6396,44 +6533,48 @@
                               </m:r>
                             </m:e>
                           </m:nary>
-                          <m:d>
-                            <m:dPr>
-                              <m:begChr m:val="("/>
-                              <m:sepChr m:val=""/>
-                              <m:endChr m:val=")"/>
-                              <m:grow/>
-                            </m:dPr>
-                            <m:e>
-                              <m:r>
-                                <m:t>x</m:t>
-                              </m:r>
-                              <m:r>
-                                <m:rPr>
-                                  <m:sty m:val="p"/>
-                                </m:rPr>
-                                <m:t>|</m:t>
-                              </m:r>
-                              <m:r>
-                                <m:t>θ</m:t>
-                              </m:r>
-                            </m:e>
-                          </m:d>
+                          <m:r>
+                            <m:rPr>
+                              <m:sty m:val="p"/>
+                            </m:rPr>
+                            <m:t>(</m:t>
+                          </m:r>
+                          <m:r>
+                            <m:t>x</m:t>
+                          </m:r>
+                          <m:r>
+                            <m:rPr>
+                              <m:sty m:val="p"/>
+                            </m:rPr>
+                            <m:t>|</m:t>
+                          </m:r>
+                          <m:r>
+                            <m:t>θ</m:t>
+                          </m:r>
+                          <m:r>
+                            <m:rPr>
+                              <m:sty m:val="p"/>
+                            </m:rPr>
+                            <m:t>)</m:t>
+                          </m:r>
                           <m:r>
                             <m:t>p</m:t>
                           </m:r>
-                          <m:d>
-                            <m:dPr>
-                              <m:begChr m:val="("/>
-                              <m:sepChr m:val=""/>
-                              <m:endChr m:val=")"/>
-                              <m:grow/>
-                            </m:dPr>
-                            <m:e>
-                              <m:r>
-                                <m:t>θ</m:t>
-                              </m:r>
-                            </m:e>
-                          </m:d>
+                          <m:r>
+                            <m:rPr>
+                              <m:sty m:val="p"/>
+                            </m:rPr>
+                            <m:t>(</m:t>
+                          </m:r>
+                          <m:r>
+                            <m:t>θ</m:t>
+                          </m:r>
+                          <m:r>
+                            <m:rPr>
+                              <m:sty m:val="p"/>
+                            </m:rPr>
+                            <m:t>)</m:t>
+                          </m:r>
                           <m:r>
                             <m:t> </m:t>
                           </m:r>
@@ -6520,28 +6661,30 @@
                     <m:r>
                       <m:t>p</m:t>
                     </m:r>
-                    <m:d>
-                      <m:dPr>
-                        <m:begChr m:val="("/>
-                        <m:sepChr m:val=""/>
-                        <m:endChr m:val=")"/>
-                        <m:grow/>
-                      </m:dPr>
-                      <m:e>
-                        <m:r>
-                          <m:t>x</m:t>
-                        </m:r>
-                        <m:r>
-                          <m:rPr>
-                            <m:sty m:val="p"/>
-                          </m:rPr>
-                          <m:t>|</m:t>
-                        </m:r>
-                        <m:r>
-                          <m:t>θ</m:t>
-                        </m:r>
-                      </m:e>
-                    </m:d>
+                    <m:r>
+                      <m:rPr>
+                        <m:sty m:val="p"/>
+                      </m:rPr>
+                      <m:t>(</m:t>
+                    </m:r>
+                    <m:r>
+                      <m:t>x</m:t>
+                    </m:r>
+                    <m:r>
+                      <m:rPr>
+                        <m:sty m:val="p"/>
+                      </m:rPr>
+                      <m:t>|</m:t>
+                    </m:r>
+                    <m:r>
+                      <m:t>θ</m:t>
+                    </m:r>
+                    <m:r>
+                      <m:rPr>
+                        <m:sty m:val="p"/>
+                      </m:rPr>
+                      <m:t>)</m:t>
+                    </m:r>
                     <m:r>
                       <m:rPr>
                         <m:sty m:val="p"/>
@@ -6551,19 +6694,21 @@
                     <m:r>
                       <m:t>p</m:t>
                     </m:r>
-                    <m:d>
-                      <m:dPr>
-                        <m:begChr m:val="("/>
-                        <m:sepChr m:val=""/>
-                        <m:endChr m:val=")"/>
-                        <m:grow/>
-                      </m:dPr>
-                      <m:e>
-                        <m:r>
-                          <m:t>θ</m:t>
-                        </m:r>
-                      </m:e>
-                    </m:d>
+                    <m:r>
+                      <m:rPr>
+                        <m:sty m:val="p"/>
+                      </m:rPr>
+                      <m:t>(</m:t>
+                    </m:r>
+                    <m:r>
+                      <m:t>θ</m:t>
+                    </m:r>
+                    <m:r>
+                      <m:rPr>
+                        <m:sty m:val="p"/>
+                      </m:rPr>
+                      <m:t>)</m:t>
+                    </m:r>
                   </m:oMath>
                 </a14:m>
                 <a:r>
@@ -6590,6 +6735,9 @@
                         </m:naryPr>
                         <m:sub>
                           <m:r>
+                            <m:rPr>
+                              <m:sty m:val="p"/>
+                            </m:rPr>
                             <m:t>Θ</m:t>
                           </m:r>
                         </m:sub>
@@ -6604,44 +6752,48 @@
                           </m:r>
                         </m:e>
                       </m:nary>
-                      <m:d>
-                        <m:dPr>
-                          <m:begChr m:val="("/>
-                          <m:sepChr m:val=""/>
-                          <m:endChr m:val=")"/>
-                          <m:grow/>
-                        </m:dPr>
-                        <m:e>
-                          <m:r>
-                            <m:t>x</m:t>
-                          </m:r>
-                          <m:r>
-                            <m:rPr>
-                              <m:sty m:val="p"/>
-                            </m:rPr>
-                            <m:t>|</m:t>
-                          </m:r>
-                          <m:r>
-                            <m:t>θ</m:t>
-                          </m:r>
-                        </m:e>
-                      </m:d>
+                      <m:r>
+                        <m:rPr>
+                          <m:sty m:val="p"/>
+                        </m:rPr>
+                        <m:t>(</m:t>
+                      </m:r>
+                      <m:r>
+                        <m:t>x</m:t>
+                      </m:r>
+                      <m:r>
+                        <m:rPr>
+                          <m:sty m:val="p"/>
+                        </m:rPr>
+                        <m:t>|</m:t>
+                      </m:r>
+                      <m:r>
+                        <m:t>θ</m:t>
+                      </m:r>
+                      <m:r>
+                        <m:rPr>
+                          <m:sty m:val="p"/>
+                        </m:rPr>
+                        <m:t>)</m:t>
+                      </m:r>
                       <m:r>
                         <m:t>p</m:t>
                       </m:r>
-                      <m:d>
-                        <m:dPr>
-                          <m:begChr m:val="("/>
-                          <m:sepChr m:val=""/>
-                          <m:endChr m:val=")"/>
-                          <m:grow/>
-                        </m:dPr>
-                        <m:e>
-                          <m:r>
-                            <m:t>θ</m:t>
-                          </m:r>
-                        </m:e>
-                      </m:d>
+                      <m:r>
+                        <m:rPr>
+                          <m:sty m:val="p"/>
+                        </m:rPr>
+                        <m:t>(</m:t>
+                      </m:r>
+                      <m:r>
+                        <m:t>θ</m:t>
+                      </m:r>
+                      <m:r>
+                        <m:rPr>
+                          <m:sty m:val="p"/>
+                        </m:rPr>
+                        <m:t>)</m:t>
+                      </m:r>
                       <m:r>
                         <m:t> </m:t>
                       </m:r>
